--- a/dist/초1/국어/한글/초1_국어_한글_04_받침있는글자.pptx
+++ b/dist/초1/국어/한글/초1_국어_한글_04_받침있는글자.pptx
@@ -120,19 +120,19 @@
   <p:extLst>
     <p:ext uri="{521415D9-36F7-43E2-AB2F-B90AF26B5E84}">
       <p14:sectionLst xmlns:p14="http://schemas.microsoft.com/office/powerpoint/2010/main">
-        <p14:section name="도입" id="{dc33ca68-8c54-7918-fb36-c37c2fe78872}">
+        <p14:section name="도입" id="{dae9aaee-a1b7-3a24-968c-e9c540411800}">
           <p14:sldIdLst>
             <p14:sldId id="256"/>
             <p14:sldId id="257"/>
           </p14:sldIdLst>
         </p14:section>
-        <p14:section name="개념" id="{a4033f19-a022-5afc-ae02-d50b47018637}">
+        <p14:section name="개념" id="{5c56ddf7-a651-046b-ff24-366e7e9f6b43}">
           <p14:sldIdLst>
             <p14:sldId id="258"/>
             <p14:sldId id="259"/>
           </p14:sldIdLst>
         </p14:section>
-        <p14:section name="연습" id="{3ea7d055-9458-ced4-0b2b-1720c3d4b25e}">
+        <p14:section name="연습" id="{9703312d-3e61-903b-9f71-b5482fe6ee17}">
           <p14:sldIdLst>
             <p14:sldId id="260"/>
             <p14:sldId id="261"/>
@@ -141,19 +141,19 @@
             <p14:sldId id="264"/>
           </p14:sldIdLst>
         </p14:section>
-        <p14:section name="확인" id="{0f29107f-e346-dad9-f06d-7e92b9e85d50}">
+        <p14:section name="확인" id="{caba0505-48a6-1dfa-1c70-dbf17a588a9b}">
           <p14:sldIdLst>
             <p14:sldId id="265"/>
             <p14:sldId id="266"/>
             <p14:sldId id="267"/>
           </p14:sldIdLst>
         </p14:section>
-        <p14:section name="정리" id="{b3f6d3e0-6e1e-79a7-e8f7-856ae2bfd81a}">
+        <p14:section name="정리" id="{c0bd470f-b7ba-c6e7-dffc-a449edc31c5f}">
           <p14:sldIdLst>
             <p14:sldId id="268"/>
           </p14:sldIdLst>
         </p14:section>
-        <p14:section name="보충" id="{8b0dc6a9-f881-a629-0bb1-b0c270819b59}">
+        <p14:section name="보충" id="{86d8f3ed-2b09-eeff-47f6-5a4e6ed08ad7}">
           <p14:sldIdLst>
             <p14:sldId id="269"/>
           </p14:sldIdLst>

--- a/dist/초1/국어/한글/초1_국어_한글_04_받침있는글자.pptx
+++ b/dist/초1/국어/한글/초1_국어_한글_04_받침있는글자.pptx
@@ -120,19 +120,19 @@
   <p:extLst>
     <p:ext uri="{521415D9-36F7-43E2-AB2F-B90AF26B5E84}">
       <p14:sectionLst xmlns:p14="http://schemas.microsoft.com/office/powerpoint/2010/main">
-        <p14:section name="도입" id="{dae9aaee-a1b7-3a24-968c-e9c540411800}">
+        <p14:section name="도입" id="{977027a0-3e57-4f5d-4b6a-ed9b112e0e45}">
           <p14:sldIdLst>
             <p14:sldId id="256"/>
             <p14:sldId id="257"/>
           </p14:sldIdLst>
         </p14:section>
-        <p14:section name="개념" id="{5c56ddf7-a651-046b-ff24-366e7e9f6b43}">
+        <p14:section name="개념" id="{ae56d103-45e4-fb6d-4493-84465ed07483}">
           <p14:sldIdLst>
             <p14:sldId id="258"/>
             <p14:sldId id="259"/>
           </p14:sldIdLst>
         </p14:section>
-        <p14:section name="연습" id="{9703312d-3e61-903b-9f71-b5482fe6ee17}">
+        <p14:section name="연습" id="{7c365d98-a3eb-f579-9193-240800b63417}">
           <p14:sldIdLst>
             <p14:sldId id="260"/>
             <p14:sldId id="261"/>
@@ -141,19 +141,19 @@
             <p14:sldId id="264"/>
           </p14:sldIdLst>
         </p14:section>
-        <p14:section name="확인" id="{caba0505-48a6-1dfa-1c70-dbf17a588a9b}">
+        <p14:section name="확인" id="{dc9ccb25-44b4-4571-52b3-e992554e45ae}">
           <p14:sldIdLst>
             <p14:sldId id="265"/>
             <p14:sldId id="266"/>
             <p14:sldId id="267"/>
           </p14:sldIdLst>
         </p14:section>
-        <p14:section name="정리" id="{c0bd470f-b7ba-c6e7-dffc-a449edc31c5f}">
+        <p14:section name="정리" id="{f75bdcb6-345b-ef36-845d-f6ade28785a9}">
           <p14:sldIdLst>
             <p14:sldId id="268"/>
           </p14:sldIdLst>
         </p14:section>
-        <p14:section name="보충" id="{86d8f3ed-2b09-eeff-47f6-5a4e6ed08ad7}">
+        <p14:section name="보충" id="{5684c0cd-75a3-313b-5fcc-58b50c98be02}">
           <p14:sldIdLst>
             <p14:sldId id="269"/>
           </p14:sldIdLst>
@@ -3365,7 +3365,7 @@
         <p:spPr>
           <a:xfrm>
             <a:off x="1344168" y="2011680"/>
-            <a:ext cx="1965960" cy="1280160"/>
+            <a:ext cx="2606040" cy="1280160"/>
           </a:xfrm>
           <a:prstGeom prst="roundRect">
             <a:avLst>
@@ -3411,8 +3411,8 @@
         </p:nvSpPr>
         <p:spPr>
           <a:xfrm>
-            <a:off x="3584448" y="2011680"/>
-            <a:ext cx="1965960" cy="1280160"/>
+            <a:off x="4224528" y="2011680"/>
+            <a:ext cx="2606040" cy="1280160"/>
           </a:xfrm>
           <a:prstGeom prst="roundRect">
             <a:avLst>
@@ -3506,7 +3506,7 @@
         <p:spPr>
           <a:xfrm>
             <a:off x="1344168" y="3474720"/>
-            <a:ext cx="1965960" cy="1280160"/>
+            <a:ext cx="2606040" cy="1280160"/>
           </a:xfrm>
           <a:prstGeom prst="roundRect">
             <a:avLst>
@@ -3552,8 +3552,8 @@
         </p:nvSpPr>
         <p:spPr>
           <a:xfrm>
-            <a:off x="3584448" y="3474720"/>
-            <a:ext cx="1965960" cy="1280160"/>
+            <a:off x="4224528" y="3474720"/>
+            <a:ext cx="2606040" cy="1280160"/>
           </a:xfrm>
           <a:prstGeom prst="roundRect">
             <a:avLst>
@@ -6046,7 +6046,7 @@
         </p:nvSpPr>
         <p:spPr>
           <a:xfrm>
-            <a:off x="548640" y="2459736"/>
+            <a:off x="548640" y="2734056"/>
             <a:ext cx="566928" cy="566928"/>
           </a:xfrm>
           <a:prstGeom prst="roundRect">
@@ -6093,12 +6093,12 @@
         </p:nvSpPr>
         <p:spPr>
           <a:xfrm>
-            <a:off x="1344168" y="2109216"/>
-            <a:ext cx="1267968" cy="1267968"/>
+            <a:off x="1828800" y="2331720"/>
+            <a:ext cx="1371600" cy="1371600"/>
           </a:xfrm>
           <a:prstGeom prst="roundRect">
             <a:avLst>
-              <a:gd name="adj" fmla="val 10096"/>
+              <a:gd name="adj" fmla="val 9333"/>
             </a:avLst>
           </a:prstGeom>
           <a:solidFill>
@@ -6118,7 +6118,7 @@
               <a:buNone/>
             </a:pPr>
             <a:r>
-              <a:rPr lang="ko-KR" altLang="en-US" sz="5500" b="1" dirty="0">
+              <a:rPr lang="ko-KR" altLang="en-US" sz="5900" b="1" dirty="0">
                 <a:solidFill>
                   <a:srgbClr val="1F2937"/>
                 </a:solidFill>
@@ -6128,7 +6128,7 @@
               </a:rPr>
               <a:t>고</a:t>
             </a:r>
-            <a:endParaRPr lang="ko-KR" sz="5500" dirty="0"/>
+            <a:endParaRPr lang="ko-KR" sz="5900" dirty="0"/>
           </a:p>
         </p:txBody>
       </p:sp>
@@ -6140,12 +6140,12 @@
         </p:nvSpPr>
         <p:spPr>
           <a:xfrm>
-            <a:off x="2813304" y="2109216"/>
-            <a:ext cx="1267968" cy="1267968"/>
+            <a:off x="3401568" y="2331720"/>
+            <a:ext cx="1371600" cy="1371600"/>
           </a:xfrm>
           <a:prstGeom prst="roundRect">
             <a:avLst>
-              <a:gd name="adj" fmla="val 10096"/>
+              <a:gd name="adj" fmla="val 9333"/>
             </a:avLst>
           </a:prstGeom>
           <a:solidFill>
@@ -6165,7 +6165,7 @@
               <a:buNone/>
             </a:pPr>
             <a:r>
-              <a:rPr lang="ko-KR" altLang="en-US" sz="5500" b="1" dirty="0">
+              <a:rPr lang="ko-KR" altLang="en-US" sz="5900" b="1" dirty="0">
                 <a:solidFill>
                   <a:srgbClr val="1F2937"/>
                 </a:solidFill>
@@ -6175,7 +6175,7 @@
               </a:rPr>
               <a:t>너</a:t>
             </a:r>
-            <a:endParaRPr lang="ko-KR" sz="5500" dirty="0"/>
+            <a:endParaRPr lang="ko-KR" sz="5900" dirty="0"/>
           </a:p>
         </p:txBody>
       </p:sp>
@@ -6187,12 +6187,12 @@
         </p:nvSpPr>
         <p:spPr>
           <a:xfrm>
-            <a:off x="4282440" y="2109216"/>
-            <a:ext cx="1267968" cy="1267968"/>
+            <a:off x="4974336" y="2331720"/>
+            <a:ext cx="1371600" cy="1371600"/>
           </a:xfrm>
           <a:prstGeom prst="roundRect">
             <a:avLst>
-              <a:gd name="adj" fmla="val 10096"/>
+              <a:gd name="adj" fmla="val 9333"/>
             </a:avLst>
           </a:prstGeom>
           <a:solidFill>
@@ -6212,7 +6212,7 @@
               <a:buNone/>
             </a:pPr>
             <a:r>
-              <a:rPr lang="ko-KR" altLang="en-US" sz="5500" b="1" dirty="0">
+              <a:rPr lang="ko-KR" altLang="en-US" sz="5900" b="1" dirty="0">
                 <a:solidFill>
                   <a:srgbClr val="1F2937"/>
                 </a:solidFill>
@@ -6222,7 +6222,7 @@
               </a:rPr>
               <a:t>수</a:t>
             </a:r>
-            <a:endParaRPr lang="ko-KR" sz="5500" dirty="0"/>
+            <a:endParaRPr lang="ko-KR" sz="5900" dirty="0"/>
           </a:p>
         </p:txBody>
       </p:sp>
@@ -6234,7 +6234,7 @@
         </p:nvSpPr>
         <p:spPr>
           <a:xfrm>
-            <a:off x="548640" y="4654296"/>
+            <a:off x="548640" y="4928616"/>
             <a:ext cx="566928" cy="566928"/>
           </a:xfrm>
           <a:prstGeom prst="roundRect">
@@ -6281,12 +6281,12 @@
         </p:nvSpPr>
         <p:spPr>
           <a:xfrm>
-            <a:off x="1344168" y="4206240"/>
-            <a:ext cx="1965960" cy="1463040"/>
+            <a:off x="1344168" y="4343400"/>
+            <a:ext cx="2606040" cy="1737360"/>
           </a:xfrm>
           <a:prstGeom prst="roundRect">
             <a:avLst>
-              <a:gd name="adj" fmla="val 8750"/>
+              <a:gd name="adj" fmla="val 7368"/>
             </a:avLst>
           </a:prstGeom>
           <a:solidFill>
@@ -6328,12 +6328,12 @@
         </p:nvSpPr>
         <p:spPr>
           <a:xfrm>
-            <a:off x="3584448" y="4206240"/>
-            <a:ext cx="1965960" cy="1463040"/>
+            <a:off x="4224528" y="4343400"/>
+            <a:ext cx="2606040" cy="1737360"/>
           </a:xfrm>
           <a:prstGeom prst="roundRect">
             <a:avLst>
-              <a:gd name="adj" fmla="val 8750"/>
+              <a:gd name="adj" fmla="val 7368"/>
             </a:avLst>
           </a:prstGeom>
           <a:solidFill>
@@ -7936,7 +7936,7 @@
                         <a:buNone/>
                       </a:pPr>
                       <a:r>
-                        <a:rPr lang="en-US" sz="3200" b="1" dirty="0">
+                        <a:rPr lang="en-US" sz="4500" b="1" dirty="0">
                           <a:solidFill>
                             <a:srgbClr val="1F2937"/>
                           </a:solidFill>
@@ -7946,7 +7946,7 @@
                         </a:rPr>
                         <a:t>ㄱ</a:t>
                       </a:r>
-                      <a:endParaRPr lang="en-US" sz="3200" dirty="0">
+                      <a:endParaRPr lang="en-US" sz="4500" dirty="0">
                         <a:latin typeface="맑은 고딕" charset="0"/>
                         <a:ea typeface="맑은 고딕" charset="0"/>
                         <a:cs typeface="맑은 고딕" charset="0"/>
@@ -8004,7 +8004,7 @@
                         <a:buNone/>
                       </a:pPr>
                       <a:r>
-                        <a:rPr lang="en-US" sz="3200" b="1" dirty="0">
+                        <a:rPr lang="en-US" sz="4500" b="1" dirty="0">
                           <a:solidFill>
                             <a:srgbClr val="1F2937"/>
                           </a:solidFill>
@@ -8014,7 +8014,7 @@
                         </a:rPr>
                         <a:t>ㄴ</a:t>
                       </a:r>
-                      <a:endParaRPr lang="en-US" sz="3200" dirty="0">
+                      <a:endParaRPr lang="en-US" sz="4500" dirty="0">
                         <a:latin typeface="맑은 고딕" charset="0"/>
                         <a:ea typeface="맑은 고딕" charset="0"/>
                         <a:cs typeface="맑은 고딕" charset="0"/>
@@ -8072,7 +8072,7 @@
                         <a:buNone/>
                       </a:pPr>
                       <a:r>
-                        <a:rPr lang="en-US" sz="3200" b="1" dirty="0">
+                        <a:rPr lang="en-US" sz="4500" b="1" dirty="0">
                           <a:solidFill>
                             <a:srgbClr val="1F2937"/>
                           </a:solidFill>
@@ -8082,7 +8082,7 @@
                         </a:rPr>
                         <a:t>ㄷ</a:t>
                       </a:r>
-                      <a:endParaRPr lang="en-US" sz="3200" dirty="0">
+                      <a:endParaRPr lang="en-US" sz="4500" dirty="0">
                         <a:latin typeface="맑은 고딕" charset="0"/>
                         <a:ea typeface="맑은 고딕" charset="0"/>
                         <a:cs typeface="맑은 고딕" charset="0"/>
@@ -8140,7 +8140,7 @@
                         <a:buNone/>
                       </a:pPr>
                       <a:r>
-                        <a:rPr lang="en-US" sz="3200" b="1" dirty="0">
+                        <a:rPr lang="en-US" sz="4500" b="1" dirty="0">
                           <a:solidFill>
                             <a:srgbClr val="1F2937"/>
                           </a:solidFill>
@@ -8150,7 +8150,7 @@
                         </a:rPr>
                         <a:t>ㄹ</a:t>
                       </a:r>
-                      <a:endParaRPr lang="en-US" sz="3200" dirty="0">
+                      <a:endParaRPr lang="en-US" sz="4500" dirty="0">
                         <a:latin typeface="맑은 고딕" charset="0"/>
                         <a:ea typeface="맑은 고딕" charset="0"/>
                         <a:cs typeface="맑은 고딕" charset="0"/>
@@ -8208,7 +8208,7 @@
                         <a:buNone/>
                       </a:pPr>
                       <a:r>
-                        <a:rPr lang="en-US" sz="3200" b="1" dirty="0">
+                        <a:rPr lang="en-US" sz="4500" b="1" dirty="0">
                           <a:solidFill>
                             <a:srgbClr val="1F2937"/>
                           </a:solidFill>
@@ -8218,7 +8218,7 @@
                         </a:rPr>
                         <a:t>ㅁ</a:t>
                       </a:r>
-                      <a:endParaRPr lang="en-US" sz="3200" dirty="0">
+                      <a:endParaRPr lang="en-US" sz="4500" dirty="0">
                         <a:latin typeface="맑은 고딕" charset="0"/>
                         <a:ea typeface="맑은 고딕" charset="0"/>
                         <a:cs typeface="맑은 고딕" charset="0"/>
@@ -8276,7 +8276,7 @@
                         <a:buNone/>
                       </a:pPr>
                       <a:r>
-                        <a:rPr lang="en-US" sz="3200" b="1" dirty="0">
+                        <a:rPr lang="en-US" sz="4500" b="1" dirty="0">
                           <a:solidFill>
                             <a:srgbClr val="1F2937"/>
                           </a:solidFill>
@@ -8286,7 +8286,7 @@
                         </a:rPr>
                         <a:t>ㅂ</a:t>
                       </a:r>
-                      <a:endParaRPr lang="en-US" sz="3200" dirty="0">
+                      <a:endParaRPr lang="en-US" sz="4500" dirty="0">
                         <a:latin typeface="맑은 고딕" charset="0"/>
                         <a:ea typeface="맑은 고딕" charset="0"/>
                         <a:cs typeface="맑은 고딕" charset="0"/>
@@ -8344,7 +8344,7 @@
                         <a:buNone/>
                       </a:pPr>
                       <a:r>
-                        <a:rPr lang="en-US" sz="3200" b="1" dirty="0">
+                        <a:rPr lang="en-US" sz="4500" b="1" dirty="0">
                           <a:solidFill>
                             <a:srgbClr val="1F2937"/>
                           </a:solidFill>
@@ -8354,7 +8354,7 @@
                         </a:rPr>
                         <a:t>ㅇ</a:t>
                       </a:r>
-                      <a:endParaRPr lang="en-US" sz="3200" dirty="0">
+                      <a:endParaRPr lang="en-US" sz="4500" dirty="0">
                         <a:latin typeface="맑은 고딕" charset="0"/>
                         <a:ea typeface="맑은 고딕" charset="0"/>
                         <a:cs typeface="맑은 고딕" charset="0"/>

--- a/dist/초1/국어/한글/초1_국어_한글_04_받침있는글자.pptx
+++ b/dist/초1/국어/한글/초1_국어_한글_04_받침있는글자.pptx
@@ -120,19 +120,19 @@
   <p:extLst>
     <p:ext uri="{521415D9-36F7-43E2-AB2F-B90AF26B5E84}">
       <p14:sectionLst xmlns:p14="http://schemas.microsoft.com/office/powerpoint/2010/main">
-        <p14:section name="도입" id="{977027a0-3e57-4f5d-4b6a-ed9b112e0e45}">
+        <p14:section name="도입" id="{6cccecf7-ff3f-92ab-252f-f903bbeb76f7}">
           <p14:sldIdLst>
             <p14:sldId id="256"/>
             <p14:sldId id="257"/>
           </p14:sldIdLst>
         </p14:section>
-        <p14:section name="개념" id="{ae56d103-45e4-fb6d-4493-84465ed07483}">
+        <p14:section name="개념" id="{f1659453-d0f0-2dcf-61b4-808dac1f4cdf}">
           <p14:sldIdLst>
             <p14:sldId id="258"/>
             <p14:sldId id="259"/>
           </p14:sldIdLst>
         </p14:section>
-        <p14:section name="연습" id="{7c365d98-a3eb-f579-9193-240800b63417}">
+        <p14:section name="연습" id="{3b329e95-8945-ac5a-77ea-56e337613672}">
           <p14:sldIdLst>
             <p14:sldId id="260"/>
             <p14:sldId id="261"/>
@@ -141,19 +141,19 @@
             <p14:sldId id="264"/>
           </p14:sldIdLst>
         </p14:section>
-        <p14:section name="확인" id="{dc9ccb25-44b4-4571-52b3-e992554e45ae}">
+        <p14:section name="확인" id="{57090123-67c1-b848-c8f5-258233368e43}">
           <p14:sldIdLst>
             <p14:sldId id="265"/>
             <p14:sldId id="266"/>
             <p14:sldId id="267"/>
           </p14:sldIdLst>
         </p14:section>
-        <p14:section name="정리" id="{f75bdcb6-345b-ef36-845d-f6ade28785a9}">
+        <p14:section name="정리" id="{4a58df0a-015b-8f69-c219-f6756dd3dbee}">
           <p14:sldIdLst>
             <p14:sldId id="268"/>
           </p14:sldIdLst>
         </p14:section>
-        <p14:section name="보충" id="{5684c0cd-75a3-313b-5fcc-58b50c98be02}">
+        <p14:section name="보충" id="{eb7d6fa3-9e3b-4bde-8c67-425834193bfc}">
           <p14:sldIdLst>
             <p14:sldId id="269"/>
           </p14:sldIdLst>
@@ -7852,7 +7852,7 @@
           </p:nvPr>
         </p:nvGraphicFramePr>
         <p:xfrm>
-          <a:off x="548640" y="2265680"/>
+          <a:off x="548640" y="2306320"/>
           <a:ext cx="11091672" cy="914400"/>
         </p:xfrm>
         <a:graphic>
@@ -7869,7 +7869,7 @@
                 <a:gridCol w="1386459"/>
                 <a:gridCol w="1386459"/>
               </a:tblGrid>
-              <a:tr h="650240">
+              <a:tr h="629920">
                 <a:tc>
                   <a:txBody>
                     <a:bodyPr/>
@@ -8404,7 +8404,7 @@
                   </a:tcPr>
                 </a:tc>
               </a:tr>
-              <a:tr h="650240">
+              <a:tr h="629920">
                 <a:tc>
                   <a:txBody>
                     <a:bodyPr/>
@@ -8950,7 +8950,7 @@
                   </a:tcPr>
                 </a:tc>
               </a:tr>
-              <a:tr h="650240">
+              <a:tr h="629920">
                 <a:tc>
                   <a:txBody>
                     <a:bodyPr/>
@@ -9496,7 +9496,7 @@
                   </a:tcPr>
                 </a:tc>
               </a:tr>
-              <a:tr h="650240">
+              <a:tr h="629920">
                 <a:tc>
                   <a:txBody>
                     <a:bodyPr/>
